--- a/docs/assets/insightforge-office-edit-check.pptx
+++ b/docs/assets/insightforge-office-edit-check.pptx
@@ -175,7 +175,7 @@
                   <a:srgbClr val="22C3A6"/>
                 </a:solidFill>
                 <a:latin typeface="Aptos Display"/>
-                <a:ea typeface="Aptos Display"/>
+                <a:ea typeface="Arial Unicode MS"/>
               </a:rPr>
               <a:t>OFFICE EDIT CHECK</a:t>
             </a:r>
@@ -215,7 +215,7 @@
                   <a:srgbClr val="FFFFFF"/>
                 </a:solidFill>
                 <a:latin typeface="Aptos Display"/>
-                <a:ea typeface="Aptos Display"/>
+                <a:ea typeface="Arial Unicode MS"/>
               </a:rPr>
               <a:t>中国新能源乘用车渗透率增长是否受到公共充电基础设施约束？</a:t>
             </a:r>
@@ -232,34 +232,34 @@
         <p:spPr>
           <a:xfrm>
             <a:off x="1005840" y="2816352"/>
-            <a:ext cx="8961120" cy="384048"/>
-          </a:xfrm>
-          <a:prstGeom prst="rect">
-            <a:avLst/>
-          </a:prstGeom>
-          <a:noFill/>
-          <a:ln>
-            <a:noFill/>
-          </a:ln>
-        </p:spPr>
-        <p:txBody>
-          <a:bodyPr wrap="square" lIns="27432" tIns="27432" rIns="27432" bIns="27432" anchor="ctr">
-            <a:normAutofit/>
-          </a:bodyPr>
-          <a:lstStyle/>
-          <a:p>
-            <a:pPr algn="l"/>
-            <a:r>
-              <a:rPr lang="zh-CN" sz="1500">
+            <a:ext cx="9966960" cy="566928"/>
+          </a:xfrm>
+          <a:prstGeom prst="rect">
+            <a:avLst/>
+          </a:prstGeom>
+          <a:noFill/>
+          <a:ln>
+            <a:noFill/>
+          </a:ln>
+        </p:spPr>
+        <p:txBody>
+          <a:bodyPr wrap="square" lIns="27432" tIns="27432" rIns="27432" bIns="27432" anchor="t">
+            <a:normAutofit/>
+          </a:bodyPr>
+          <a:lstStyle/>
+          <a:p>
+            <a:pPr algn="l"/>
+            <a:r>
+              <a:rPr lang="zh-CN" sz="1300">
                 <a:solidFill>
                   <a:srgbClr val="C7D3DE"/>
                 </a:solidFill>
                 <a:latin typeface="Aptos"/>
-                <a:ea typeface="Aptos"/>
-              </a:rPr>
-              <a:t>研究范围 · 2023–2026｜中国乘用车与公共充电基础设施</a:t>
-            </a:r>
-            <a:endParaRPr lang="zh-CN" sz="1500"/>
+                <a:ea typeface="Arial Unicode MS"/>
+              </a:rPr>
+              <a:t>研究范围 · 围绕「中国新能源乘用车渗透率增长是否受到公共充电基础设施约束」展开；证据范围以本轮 PLAN→COLLECT 实际检索与解析的资料为准，所有结论仅在该范围内成立。</a:t>
+            </a:r>
+            <a:endParaRPr lang="zh-CN" sz="1300"/>
           </a:p>
         </p:txBody>
       </p:sp>
@@ -295,7 +295,7 @@
                   <a:srgbClr val="F5B942"/>
                 </a:solidFill>
                 <a:latin typeface="Aptos Display"/>
-                <a:ea typeface="Aptos Display"/>
+                <a:ea typeface="Arial Unicode MS"/>
               </a:rPr>
               <a:t>离线黄金案例 · 使用缓存快照</a:t>
             </a:r>
@@ -335,7 +335,7 @@
                   <a:srgbClr val="9FB0C0"/>
                 </a:solidFill>
                 <a:latin typeface="Aptos"/>
-                <a:ea typeface="Aptos"/>
+                <a:ea typeface="Arial Unicode MS"/>
               </a:rPr>
               <a:t>01</a:t>
             </a:r>
@@ -439,7 +439,7 @@
                   <a:srgbClr val="22C3A6"/>
                 </a:solidFill>
                 <a:latin typeface="Aptos Display"/>
-                <a:ea typeface="Aptos Display"/>
+                <a:ea typeface="Arial Unicode MS"/>
               </a:rPr>
               <a:t>CORE CONCLUSIONS</a:t>
             </a:r>
@@ -479,7 +479,7 @@
                   <a:srgbClr val="122033"/>
                 </a:solidFill>
                 <a:latin typeface="Aptos Display"/>
-                <a:ea typeface="Aptos Display"/>
+                <a:ea typeface="Arial Unicode MS"/>
               </a:rPr>
               <a:t>核心结论与人工确认状态</a:t>
             </a:r>
@@ -519,7 +519,7 @@
                   <a:srgbClr val="566579"/>
                 </a:solidFill>
                 <a:latin typeface="Aptos"/>
-                <a:ea typeface="Aptos"/>
+                <a:ea typeface="Arial Unicode MS"/>
               </a:rPr>
               <a:t>02</a:t>
             </a:r>
@@ -559,7 +559,7 @@
                   <a:srgbClr val="F5B942"/>
                 </a:solidFill>
                 <a:latin typeface="Aptos Display"/>
-                <a:ea typeface="Aptos Display"/>
+                <a:ea typeface="Arial Unicode MS"/>
               </a:rPr>
               <a:t>01</a:t>
             </a:r>
@@ -599,9 +599,9 @@
                   <a:srgbClr val="122033"/>
                 </a:solidFill>
                 <a:latin typeface="Aptos Display"/>
-                <a:ea typeface="Aptos Display"/>
-              </a:rPr>
-              <a:t>中国新能源乘用车渗透率增长是否受：2024 渗透率已接近一半，但口径差异必须先解决。</a:t>
+                <a:ea typeface="Arial Unicode MS"/>
+              </a:rPr>
+              <a:t>2024 年新能源乘用车国内零售渗透率 47.6% 与当时预测输入重算的全汽车销量份额 37.1% 不可直接合并；两值应同时保留，相关判断必须先限定车辆对象、分母、数据阶段和交易口径。</a:t>
             </a:r>
             <a:endParaRPr lang="zh-CN" sz="1400"/>
           </a:p>
@@ -670,7 +670,7 @@
                   <a:srgbClr val="FFFFFF"/>
                 </a:solidFill>
                 <a:latin typeface="Aptos Display"/>
-                <a:ea typeface="Aptos Display"/>
+                <a:ea typeface="Arial Unicode MS"/>
               </a:rPr>
               <a:t>PENDING_REVIEW</a:t>
             </a:r>
@@ -710,9 +710,9 @@
                   <a:srgbClr val="566579"/>
                 </a:solidFill>
                 <a:latin typeface="Aptos"/>
-                <a:ea typeface="Aptos"/>
-              </a:rPr>
-              <a:t>[S1] [S2]</a:t>
+                <a:ea typeface="Arial Unicode MS"/>
+              </a:rPr>
+              <a:t>[S1] [S5]</a:t>
             </a:r>
             <a:endParaRPr lang="zh-CN" sz="800"/>
           </a:p>
@@ -781,7 +781,7 @@
                   <a:srgbClr val="22C3A6"/>
                 </a:solidFill>
                 <a:latin typeface="Aptos Display"/>
-                <a:ea typeface="Aptos Display"/>
+                <a:ea typeface="Arial Unicode MS"/>
               </a:rPr>
               <a:t>02</a:t>
             </a:r>
@@ -821,9 +821,9 @@
                   <a:srgbClr val="122033"/>
                 </a:solidFill>
                 <a:latin typeface="Aptos Display"/>
-                <a:ea typeface="Aptos Display"/>
-              </a:rPr>
-              <a:t>公共充电点增长快于销量基数变化，但地理与利用率错配使名义供给不能直接等同于有效供给。</a:t>
+                <a:ea typeface="Arial Unicode MS"/>
+              </a:rPr>
+              <a:t>公共充电桩约 31.3% 的同比增长证明名义基础设施仍在扩张，但桩数量增长不能替代地域分布、可用率和高峰利用率验证。</a:t>
             </a:r>
             <a:endParaRPr lang="zh-CN" sz="1400"/>
           </a:p>
@@ -892,7 +892,7 @@
                   <a:srgbClr val="FFFFFF"/>
                 </a:solidFill>
                 <a:latin typeface="Aptos Display"/>
-                <a:ea typeface="Aptos Display"/>
+                <a:ea typeface="Arial Unicode MS"/>
               </a:rPr>
               <a:t>PENDING_REVIEW</a:t>
             </a:r>
@@ -932,9 +932,9 @@
                   <a:srgbClr val="566579"/>
                 </a:solidFill>
                 <a:latin typeface="Aptos"/>
-                <a:ea typeface="Aptos"/>
-              </a:rPr>
-              <a:t>[S1] [S2] [S3]</a:t>
+                <a:ea typeface="Arial Unicode MS"/>
+              </a:rPr>
+              <a:t>[S3] [S4] [S5]</a:t>
             </a:r>
             <a:endParaRPr lang="zh-CN" sz="800"/>
           </a:p>
@@ -1003,7 +1003,7 @@
                   <a:srgbClr val="22C3A6"/>
                 </a:solidFill>
                 <a:latin typeface="Aptos Display"/>
-                <a:ea typeface="Aptos Display"/>
+                <a:ea typeface="Arial Unicode MS"/>
               </a:rPr>
               <a:t>03</a:t>
             </a:r>
@@ -1043,9 +1043,9 @@
                   <a:srgbClr val="122033"/>
                 </a:solidFill>
                 <a:latin typeface="Aptos Display"/>
-                <a:ea typeface="Aptos Display"/>
-              </a:rPr>
-              <a:t>协会对 2025 年渗透率仍有上行预测，但该预测不能被呈现为已经发生的事实。</a:t>
+                <a:ea typeface="Arial Unicode MS"/>
+              </a:rPr>
+              <a:t>在明确采用 15% 利用率折损这一演示情景假设时，风险调整后的名义公共充电供给约为 3.04 百万个；该估算只用于敏感性展示，不能升级为全国实际利用率事实。</a:t>
             </a:r>
             <a:endParaRPr lang="zh-CN" sz="1400"/>
           </a:p>
@@ -1114,7 +1114,7 @@
                   <a:srgbClr val="FFFFFF"/>
                 </a:solidFill>
                 <a:latin typeface="Aptos Display"/>
-                <a:ea typeface="Aptos Display"/>
+                <a:ea typeface="Arial Unicode MS"/>
               </a:rPr>
               <a:t>PENDING_REVIEW</a:t>
             </a:r>
@@ -1154,9 +1154,9 @@
                   <a:srgbClr val="566579"/>
                 </a:solidFill>
                 <a:latin typeface="Aptos"/>
-                <a:ea typeface="Aptos"/>
-              </a:rPr>
-              <a:t>[S1]</a:t>
+                <a:ea typeface="Arial Unicode MS"/>
+              </a:rPr>
+              <a:t>[S3] [S5]</a:t>
             </a:r>
             <a:endParaRPr lang="zh-CN" sz="800"/>
           </a:p>
@@ -1225,7 +1225,7 @@
                   <a:srgbClr val="E85D75"/>
                 </a:solidFill>
                 <a:latin typeface="Aptos Display"/>
-                <a:ea typeface="Aptos Display"/>
+                <a:ea typeface="Arial Unicode MS"/>
               </a:rPr>
               <a:t>04</a:t>
             </a:r>
@@ -1265,9 +1265,9 @@
                   <a:srgbClr val="122033"/>
                 </a:solidFill>
                 <a:latin typeface="Aptos Display"/>
-                <a:ea typeface="Aptos Display"/>
-              </a:rPr>
-              <a:t>证据不足：无法判断基础设施扩张是否会在 2025 年普遍提升运营商盈利能力。</a:t>
+                <a:ea typeface="Arial Unicode MS"/>
+              </a:rPr>
+              <a:t>现有全国描述性资料不足以证明公共充电基础设施是新能源乘用车渗透率增长的单一因果约束；在地区对照、利用率和混杂因素资料补齐前，这一判断必须保持证据不足。</a:t>
             </a:r>
             <a:endParaRPr lang="zh-CN" sz="1400"/>
           </a:p>
@@ -1336,7 +1336,7 @@
                   <a:srgbClr val="FFFFFF"/>
                 </a:solidFill>
                 <a:latin typeface="Aptos Display"/>
-                <a:ea typeface="Aptos Display"/>
+                <a:ea typeface="Arial Unicode MS"/>
               </a:rPr>
               <a:t>PENDING_REVIEW</a:t>
             </a:r>
@@ -1376,9 +1376,9 @@
                   <a:srgbClr val="566579"/>
                 </a:solidFill>
                 <a:latin typeface="Aptos"/>
-                <a:ea typeface="Aptos"/>
-              </a:rPr>
-              <a:t>[S1]</a:t>
+                <a:ea typeface="Arial Unicode MS"/>
+              </a:rPr>
+              <a:t>[S4]</a:t>
             </a:r>
             <a:endParaRPr lang="zh-CN" sz="800"/>
           </a:p>
@@ -1480,7 +1480,7 @@
                   <a:srgbClr val="22C3A6"/>
                 </a:solidFill>
                 <a:latin typeface="Aptos Display"/>
-                <a:ea typeface="Aptos Display"/>
+                <a:ea typeface="Arial Unicode MS"/>
               </a:rPr>
               <a:t>DETERMINISTIC CALCULATIONS</a:t>
             </a:r>
@@ -1520,7 +1520,7 @@
                   <a:srgbClr val="122033"/>
                 </a:solidFill>
                 <a:latin typeface="Aptos Display"/>
-                <a:ea typeface="Aptos Display"/>
+                <a:ea typeface="Arial Unicode MS"/>
               </a:rPr>
               <a:t>关键数据、公式与可重算输入</a:t>
             </a:r>
@@ -1560,7 +1560,7 @@
                   <a:srgbClr val="566579"/>
                 </a:solidFill>
                 <a:latin typeface="Aptos"/>
-                <a:ea typeface="Aptos"/>
+                <a:ea typeface="Arial Unicode MS"/>
               </a:rPr>
               <a:t>03</a:t>
             </a:r>
@@ -1631,7 +1631,7 @@
                   <a:srgbClr val="122033"/>
                 </a:solidFill>
                 <a:latin typeface="Aptos Display"/>
-                <a:ea typeface="Aptos Display"/>
+                <a:ea typeface="Arial Unicode MS"/>
               </a:rPr>
               <a:t>37.1%</a:t>
             </a:r>
@@ -1671,7 +1671,7 @@
                   <a:srgbClr val="566579"/>
                 </a:solidFill>
                 <a:latin typeface="Aptos Display"/>
-                <a:ea typeface="Aptos Display"/>
+                <a:ea typeface="Arial Unicode MS"/>
               </a:rPr>
               <a:t>2024 新能源汽车份额（预测输入）</a:t>
             </a:r>
@@ -1711,7 +1711,7 @@
                   <a:srgbClr val="566579"/>
                 </a:solidFill>
                 <a:latin typeface="Aptos"/>
-                <a:ea typeface="Aptos"/>
+                <a:ea typeface="Arial Unicode MS"/>
               </a:rPr>
               <a:t>nev_sales_million / total_auto_sales_million * 100</a:t>
             </a:r>
@@ -1725,7 +1725,7 @@
                   <a:srgbClr val="566579"/>
                 </a:solidFill>
                 <a:latin typeface="Aptos"/>
-                <a:ea typeface="Aptos"/>
+                <a:ea typeface="Arial Unicode MS"/>
               </a:rPr>
               <a:t>输入：新能源汽车预测销量=11.5百万辆；汽车预测总销量=31百万辆</a:t>
             </a:r>
@@ -1796,7 +1796,7 @@
                   <a:srgbClr val="122033"/>
                 </a:solidFill>
                 <a:latin typeface="Aptos Display"/>
-                <a:ea typeface="Aptos Display"/>
+                <a:ea typeface="Arial Unicode MS"/>
               </a:rPr>
               <a:t>3.04 百万</a:t>
             </a:r>
@@ -1836,7 +1836,7 @@
                   <a:srgbClr val="566579"/>
                 </a:solidFill>
                 <a:latin typeface="Aptos Display"/>
-                <a:ea typeface="Aptos Display"/>
+                <a:ea typeface="Arial Unicode MS"/>
               </a:rPr>
               <a:t>风险调整后可有效服务充电点（估算）</a:t>
             </a:r>
@@ -1876,7 +1876,7 @@
                   <a:srgbClr val="566579"/>
                 </a:solidFill>
                 <a:latin typeface="Aptos"/>
-                <a:ea typeface="Aptos"/>
+                <a:ea typeface="Arial Unicode MS"/>
               </a:rPr>
               <a:t>public_chargers_million * (1 - utilization_gap_assumption)</a:t>
             </a:r>
@@ -1890,9 +1890,9 @@
                   <a:srgbClr val="566579"/>
                 </a:solidFill>
                 <a:latin typeface="Aptos"/>
-                <a:ea typeface="Aptos"/>
-              </a:rPr>
-              <a:t>假设：15% 利用率折损为黄金案例演示假设，不代表行业统一口径</a:t>
+                <a:ea typeface="Arial Unicode MS"/>
+              </a:rPr>
+              <a:t>假设：15% 利用率折损仅用于演示情景，不代表全国或地区实际利用率。</a:t>
             </a:r>
             <a:endParaRPr lang="zh-CN" sz="1100"/>
           </a:p>
@@ -1930,7 +1930,7 @@
                   <a:srgbClr val="566579"/>
                 </a:solidFill>
                 <a:latin typeface="Aptos"/>
-                <a:ea typeface="Aptos"/>
+                <a:ea typeface="Arial Unicode MS"/>
               </a:rPr>
               <a:t>计算来源：market_v1.csv｜中汽协与中国充电联盟公开资料的结构化离线摘录</a:t>
             </a:r>
@@ -2034,7 +2034,7 @@
                   <a:srgbClr val="22C3A6"/>
                 </a:solidFill>
                 <a:latin typeface="Aptos Display"/>
-                <a:ea typeface="Aptos Display"/>
+                <a:ea typeface="Arial Unicode MS"/>
               </a:rPr>
               <a:t>BOUNDARIES</a:t>
             </a:r>
@@ -2074,7 +2074,7 @@
                   <a:srgbClr val="122033"/>
                 </a:solidFill>
                 <a:latin typeface="Aptos Display"/>
-                <a:ea typeface="Aptos Display"/>
+                <a:ea typeface="Arial Unicode MS"/>
               </a:rPr>
               <a:t>冲突、假设与证据不足</a:t>
             </a:r>
@@ -2114,7 +2114,7 @@
                   <a:srgbClr val="566579"/>
                 </a:solidFill>
                 <a:latin typeface="Aptos"/>
-                <a:ea typeface="Aptos"/>
+                <a:ea typeface="Arial Unicode MS"/>
               </a:rPr>
               <a:t>04</a:t>
             </a:r>
@@ -2154,7 +2154,7 @@
                   <a:srgbClr val="F5B942"/>
                 </a:solidFill>
                 <a:latin typeface="Aptos Display"/>
-                <a:ea typeface="Aptos Display"/>
+                <a:ea typeface="Arial Unicode MS"/>
               </a:rPr>
               <a:t>来源冲突</a:t>
             </a:r>
@@ -2194,9 +2194,9 @@
                   <a:srgbClr val="122033"/>
                 </a:solidFill>
                 <a:latin typeface="Aptos"/>
-                <a:ea typeface="Aptos"/>
-              </a:rPr>
-              <a:t>中汽协预测输入按全汽车销量重算为 37.1%，乘联分会按乘用车国内零售报告为 47.6%；总体/乘用车与销量/零售范围不同。这是候选解释，不能静默选值。</a:t>
+                <a:ea typeface="Arial Unicode MS"/>
+              </a:rPr>
+              <a:t>同一期间两项来源值分别为 47.6% 与 37.096774193548384%；差异可能来自车辆对象、分母、地域或交易口径。双值均保留，候选解释待人工裁决。</a:t>
             </a:r>
             <a:endParaRPr lang="zh-CN" sz="1400"/>
           </a:p>
@@ -2234,7 +2234,7 @@
                   <a:srgbClr val="566579"/>
                 </a:solidFill>
                 <a:latin typeface="Aptos Display"/>
-                <a:ea typeface="Aptos Display"/>
+                <a:ea typeface="Arial Unicode MS"/>
               </a:rPr>
               <a:t>CANDIDATE_EXPLANATION</a:t>
             </a:r>
@@ -2248,7 +2248,7 @@
                   <a:srgbClr val="566579"/>
                 </a:solidFill>
                 <a:latin typeface="Aptos Display"/>
-                <a:ea typeface="Aptos Display"/>
+                <a:ea typeface="Arial Unicode MS"/>
               </a:rPr>
               <a:t>保留双方数值，不静默取值，不求平均。</a:t>
             </a:r>
@@ -2319,7 +2319,7 @@
                   <a:srgbClr val="E85D75"/>
                 </a:solidFill>
                 <a:latin typeface="Aptos Display"/>
-                <a:ea typeface="Aptos Display"/>
+                <a:ea typeface="Arial Unicode MS"/>
               </a:rPr>
               <a:t>证据不足</a:t>
             </a:r>
@@ -2359,9 +2359,9 @@
                   <a:srgbClr val="122033"/>
                 </a:solidFill>
                 <a:latin typeface="Aptos"/>
-                <a:ea typeface="Aptos"/>
-              </a:rPr>
-              <a:t>证据不足：无法判断基础设施扩张是否会在 2025 年普遍提升运营商盈利能力。</a:t>
+                <a:ea typeface="Arial Unicode MS"/>
+              </a:rPr>
+              <a:t>现有全国描述性资料不足以证明公共充电基础设施是新能源乘用车渗透率增长的单一因果约束；在地区对照、利用率和混杂因素资料补齐前，这一判断必须保持证据不足。</a:t>
             </a:r>
             <a:endParaRPr lang="zh-CN" sz="1400"/>
           </a:p>
@@ -2430,7 +2430,7 @@
                   <a:srgbClr val="FFFFFF"/>
                 </a:solidFill>
                 <a:latin typeface="Aptos Display"/>
-                <a:ea typeface="Aptos Display"/>
+                <a:ea typeface="Arial Unicode MS"/>
               </a:rPr>
               <a:t>INSUFFICIENT_EVIDENCE</a:t>
             </a:r>
@@ -2470,9 +2470,9 @@
                   <a:srgbClr val="E85D75"/>
                 </a:solidFill>
                 <a:latin typeface="Aptos Display"/>
-                <a:ea typeface="Aptos Display"/>
-              </a:rPr>
-              <a:t>缺少：运营商盈利数据；区域利用率数据；成本与电价口径</a:t>
+                <a:ea typeface="Arial Unicode MS"/>
+              </a:rPr>
+              <a:t>缺少：地区层面的公共充电供给、家充、销量和利用率对照；价格、车型、政策、收入和城市结构等混杂因素；可支持因果识别的时间序列、自然实验或其他研究设计</a:t>
             </a:r>
             <a:endParaRPr lang="zh-CN" sz="1100"/>
           </a:p>
@@ -2510,7 +2510,7 @@
                   <a:srgbClr val="566579"/>
                 </a:solidFill>
                 <a:latin typeface="Aptos"/>
-                <a:ea typeface="Aptos"/>
+                <a:ea typeface="Arial Unicode MS"/>
               </a:rPr>
               <a:t>状态保留在报告、PPTX 与 JSON；禁止自动确认。</a:t>
             </a:r>
@@ -2614,7 +2614,7 @@
                   <a:srgbClr val="22C3A6"/>
                 </a:solidFill>
                 <a:latin typeface="Aptos Display"/>
-                <a:ea typeface="Aptos Display"/>
+                <a:ea typeface="Arial Unicode MS"/>
               </a:rPr>
               <a:t>TRACEABILITY</a:t>
             </a:r>
@@ -2654,7 +2654,7 @@
                   <a:srgbClr val="122033"/>
                 </a:solidFill>
                 <a:latin typeface="Aptos Display"/>
-                <a:ea typeface="Aptos Display"/>
+                <a:ea typeface="Arial Unicode MS"/>
               </a:rPr>
               <a:t>来源、定位与最终责任</a:t>
             </a:r>
@@ -2694,7 +2694,7 @@
                   <a:srgbClr val="566579"/>
                 </a:solidFill>
                 <a:latin typeface="Aptos"/>
-                <a:ea typeface="Aptos"/>
+                <a:ea typeface="Arial Unicode MS"/>
               </a:rPr>
               <a:t>05</a:t>
             </a:r>
@@ -2734,7 +2734,7 @@
                   <a:srgbClr val="22C3A6"/>
                 </a:solidFill>
                 <a:latin typeface="Aptos Display"/>
-                <a:ea typeface="Aptos Display"/>
+                <a:ea typeface="Arial Unicode MS"/>
               </a:rPr>
               <a:t>[S1]</a:t>
             </a:r>
@@ -2774,7 +2774,7 @@
                   <a:srgbClr val="122033"/>
                 </a:solidFill>
                 <a:latin typeface="Aptos Display"/>
-                <a:ea typeface="Aptos Display"/>
+                <a:ea typeface="Arial Unicode MS"/>
               </a:rPr>
               <a:t>2024年12月份全国乘用车市场分析</a:t>
             </a:r>
@@ -2814,7 +2814,7 @@
                   <a:srgbClr val="566579"/>
                 </a:solidFill>
                 <a:latin typeface="Aptos"/>
-                <a:ea typeface="Aptos"/>
+                <a:ea typeface="Arial Unicode MS"/>
               </a:rPr>
               <a:t>https://www.cada.cn/Trends/info_91_10118.html</a:t>
             </a:r>
@@ -2854,7 +2854,7 @@
                   <a:srgbClr val="22C3A6"/>
                 </a:solidFill>
                 <a:latin typeface="Aptos Display"/>
-                <a:ea typeface="Aptos Display"/>
+                <a:ea typeface="Arial Unicode MS"/>
               </a:rPr>
               <a:t>[S2]</a:t>
             </a:r>
@@ -2894,7 +2894,7 @@
                   <a:srgbClr val="122033"/>
                 </a:solidFill>
                 <a:latin typeface="Aptos Display"/>
-                <a:ea typeface="Aptos Display"/>
+                <a:ea typeface="Arial Unicode MS"/>
               </a:rPr>
               <a:t>乘联分会2025年新能源乘用车市场预测</a:t>
             </a:r>
@@ -2934,7 +2934,7 @@
                   <a:srgbClr val="566579"/>
                 </a:solidFill>
                 <a:latin typeface="Aptos"/>
-                <a:ea typeface="Aptos"/>
+                <a:ea typeface="Arial Unicode MS"/>
               </a:rPr>
               <a:t>https://www.cada.cn/Trends/info_91_10118.html</a:t>
             </a:r>
@@ -2974,7 +2974,7 @@
                   <a:srgbClr val="22C3A6"/>
                 </a:solidFill>
                 <a:latin typeface="Aptos Display"/>
-                <a:ea typeface="Aptos Display"/>
+                <a:ea typeface="Arial Unicode MS"/>
               </a:rPr>
               <a:t>[S3]</a:t>
             </a:r>
@@ -3014,7 +3014,7 @@
                   <a:srgbClr val="122033"/>
                 </a:solidFill>
                 <a:latin typeface="Aptos Display"/>
-                <a:ea typeface="Aptos Display"/>
+                <a:ea typeface="Arial Unicode MS"/>
               </a:rPr>
               <a:t>2024年全国电动汽车充换电基础设施运行情况</a:t>
             </a:r>
@@ -3054,7 +3054,7 @@
                   <a:srgbClr val="566579"/>
                 </a:solidFill>
                 <a:latin typeface="Aptos"/>
-                <a:ea typeface="Aptos"/>
+                <a:ea typeface="Arial Unicode MS"/>
               </a:rPr>
               <a:t>https://www.evcipa.org.cn/newsinfo/8137834.html</a:t>
             </a:r>
@@ -3094,7 +3094,7 @@
                   <a:srgbClr val="22C3A6"/>
                 </a:solidFill>
                 <a:latin typeface="Aptos Display"/>
-                <a:ea typeface="Aptos Display"/>
+                <a:ea typeface="Arial Unicode MS"/>
               </a:rPr>
               <a:t>[S4]</a:t>
             </a:r>
@@ -3134,9 +3134,9 @@
                   <a:srgbClr val="122033"/>
                 </a:solidFill>
                 <a:latin typeface="Aptos Display"/>
-                <a:ea typeface="Aptos Display"/>
-              </a:rPr>
-              <a:t>Authority Source Snapshot: China NEV and Charging Data</a:t>
+                <a:ea typeface="Arial Unicode MS"/>
+              </a:rPr>
+              <a:t>合成演示材料：新能源汽车与充电证据边界</a:t>
             </a:r>
             <a:endParaRPr lang="zh-CN" sz="1200"/>
           </a:p>
@@ -3174,7 +3174,7 @@
                   <a:srgbClr val="566579"/>
                 </a:solidFill>
                 <a:latin typeface="Aptos"/>
-                <a:ea typeface="Aptos"/>
+                <a:ea typeface="Arial Unicode MS"/>
               </a:rPr>
               <a:t>market-brief.pdf · p.1</a:t>
             </a:r>
@@ -3214,7 +3214,7 @@
                   <a:srgbClr val="22C3A6"/>
                 </a:solidFill>
                 <a:latin typeface="Aptos Display"/>
-                <a:ea typeface="Aptos Display"/>
+                <a:ea typeface="Arial Unicode MS"/>
               </a:rPr>
               <a:t>[S5]</a:t>
             </a:r>
@@ -3254,9 +3254,9 @@
                   <a:srgbClr val="122033"/>
                 </a:solidFill>
                 <a:latin typeface="Aptos Display"/>
-                <a:ea typeface="Aptos Display"/>
-              </a:rPr>
-              <a:t>Official NEV/charging structured extract — 2024 forecast</a:t>
+                <a:ea typeface="Arial Unicode MS"/>
+              </a:rPr>
+              <a:t>公开数据结构化演示摘录 — 2024 预测输入</a:t>
             </a:r>
             <a:endParaRPr lang="zh-CN" sz="1200"/>
           </a:p>
@@ -3294,7 +3294,7 @@
                   <a:srgbClr val="566579"/>
                 </a:solidFill>
                 <a:latin typeface="Aptos"/>
-                <a:ea typeface="Aptos"/>
+                <a:ea typeface="Arial Unicode MS"/>
               </a:rPr>
               <a:t>https://www.caam.org.cn/chn/1/cate_3/con_5236311.html</a:t>
             </a:r>
@@ -3365,7 +3365,7 @@
                   <a:srgbClr val="FFFFFF"/>
                 </a:solidFill>
                 <a:latin typeface="Aptos Display"/>
-                <a:ea typeface="Aptos Display"/>
+                <a:ea typeface="Arial Unicode MS"/>
               </a:rPr>
               <a:t>AI 生成候选判断</a:t>
             </a:r>
@@ -3383,7 +3383,7 @@
                   <a:srgbClr val="FFFFFF"/>
                 </a:solidFill>
                 <a:latin typeface="Aptos Display"/>
-                <a:ea typeface="Aptos Display"/>
+                <a:ea typeface="Arial Unicode MS"/>
               </a:rPr>
               <a:t>确定性规则审计</a:t>
             </a:r>
@@ -3401,7 +3401,7 @@
                   <a:srgbClr val="FFFFFF"/>
                 </a:solidFill>
                 <a:latin typeface="Aptos Display"/>
-                <a:ea typeface="Aptos Display"/>
+                <a:ea typeface="Arial Unicode MS"/>
               </a:rPr>
               <a:t>人确认最终结论</a:t>
             </a:r>
@@ -3441,7 +3441,7 @@
                   <a:srgbClr val="E85D75"/>
                 </a:solidFill>
                 <a:latin typeface="Aptos Display"/>
-                <a:ea typeface="Aptos Display"/>
+                <a:ea typeface="Arial Unicode MS"/>
               </a:rPr>
               <a:t>未确认内容不冒充最终结论</a:t>
             </a:r>
@@ -3501,12 +3501,12 @@
     <a:fontScheme name="Aptos">
       <a:majorFont>
         <a:latin typeface="Aptos Display"/>
-        <a:ea typeface="Aptos Display"/>
+        <a:ea typeface="Arial Unicode MS"/>
         <a:cs typeface="Aptos Display"/>
       </a:majorFont>
       <a:minorFont>
         <a:latin typeface="Aptos"/>
-        <a:ea typeface="Aptos"/>
+        <a:ea typeface="Arial Unicode MS"/>
         <a:cs typeface="Aptos"/>
       </a:minorFont>
     </a:fontScheme>
